--- a/figure_pipeline/fig5_external_validation/assemble_fig5/assemble_fig5.pptx
+++ b/figure_pipeline/fig5_external_validation/assemble_fig5/assemble_fig5.pptx
@@ -259,7 +259,7 @@
           <a:p>
             <a:fld id="{513CA52F-1DA9-4BF4-A3AC-3E0151F9508D}" type="datetimeFigureOut">
               <a:rPr lang="en-US" smtClean="0"/>
-              <a:t>4/7/2026</a:t>
+              <a:t>4/17/2026</a:t>
             </a:fld>
             <a:endParaRPr lang="en-US"/>
           </a:p>
@@ -457,7 +457,7 @@
           <a:p>
             <a:fld id="{513CA52F-1DA9-4BF4-A3AC-3E0151F9508D}" type="datetimeFigureOut">
               <a:rPr lang="en-US" smtClean="0"/>
-              <a:t>4/7/2026</a:t>
+              <a:t>4/17/2026</a:t>
             </a:fld>
             <a:endParaRPr lang="en-US"/>
           </a:p>
@@ -665,7 +665,7 @@
           <a:p>
             <a:fld id="{513CA52F-1DA9-4BF4-A3AC-3E0151F9508D}" type="datetimeFigureOut">
               <a:rPr lang="en-US" smtClean="0"/>
-              <a:t>4/7/2026</a:t>
+              <a:t>4/17/2026</a:t>
             </a:fld>
             <a:endParaRPr lang="en-US"/>
           </a:p>
@@ -863,7 +863,7 @@
           <a:p>
             <a:fld id="{513CA52F-1DA9-4BF4-A3AC-3E0151F9508D}" type="datetimeFigureOut">
               <a:rPr lang="en-US" smtClean="0"/>
-              <a:t>4/7/2026</a:t>
+              <a:t>4/17/2026</a:t>
             </a:fld>
             <a:endParaRPr lang="en-US"/>
           </a:p>
@@ -1138,7 +1138,7 @@
           <a:p>
             <a:fld id="{513CA52F-1DA9-4BF4-A3AC-3E0151F9508D}" type="datetimeFigureOut">
               <a:rPr lang="en-US" smtClean="0"/>
-              <a:t>4/7/2026</a:t>
+              <a:t>4/17/2026</a:t>
             </a:fld>
             <a:endParaRPr lang="en-US"/>
           </a:p>
@@ -1403,7 +1403,7 @@
           <a:p>
             <a:fld id="{513CA52F-1DA9-4BF4-A3AC-3E0151F9508D}" type="datetimeFigureOut">
               <a:rPr lang="en-US" smtClean="0"/>
-              <a:t>4/7/2026</a:t>
+              <a:t>4/17/2026</a:t>
             </a:fld>
             <a:endParaRPr lang="en-US"/>
           </a:p>
@@ -1815,7 +1815,7 @@
           <a:p>
             <a:fld id="{513CA52F-1DA9-4BF4-A3AC-3E0151F9508D}" type="datetimeFigureOut">
               <a:rPr lang="en-US" smtClean="0"/>
-              <a:t>4/7/2026</a:t>
+              <a:t>4/17/2026</a:t>
             </a:fld>
             <a:endParaRPr lang="en-US"/>
           </a:p>
@@ -1956,7 +1956,7 @@
           <a:p>
             <a:fld id="{513CA52F-1DA9-4BF4-A3AC-3E0151F9508D}" type="datetimeFigureOut">
               <a:rPr lang="en-US" smtClean="0"/>
-              <a:t>4/7/2026</a:t>
+              <a:t>4/17/2026</a:t>
             </a:fld>
             <a:endParaRPr lang="en-US"/>
           </a:p>
@@ -2069,7 +2069,7 @@
           <a:p>
             <a:fld id="{513CA52F-1DA9-4BF4-A3AC-3E0151F9508D}" type="datetimeFigureOut">
               <a:rPr lang="en-US" smtClean="0"/>
-              <a:t>4/7/2026</a:t>
+              <a:t>4/17/2026</a:t>
             </a:fld>
             <a:endParaRPr lang="en-US"/>
           </a:p>
@@ -2380,7 +2380,7 @@
           <a:p>
             <a:fld id="{513CA52F-1DA9-4BF4-A3AC-3E0151F9508D}" type="datetimeFigureOut">
               <a:rPr lang="en-US" smtClean="0"/>
-              <a:t>4/7/2026</a:t>
+              <a:t>4/17/2026</a:t>
             </a:fld>
             <a:endParaRPr lang="en-US"/>
           </a:p>
@@ -2668,7 +2668,7 @@
           <a:p>
             <a:fld id="{513CA52F-1DA9-4BF4-A3AC-3E0151F9508D}" type="datetimeFigureOut">
               <a:rPr lang="en-US" smtClean="0"/>
-              <a:t>4/7/2026</a:t>
+              <a:t>4/17/2026</a:t>
             </a:fld>
             <a:endParaRPr lang="en-US"/>
           </a:p>
@@ -2909,7 +2909,7 @@
           <a:p>
             <a:fld id="{513CA52F-1DA9-4BF4-A3AC-3E0151F9508D}" type="datetimeFigureOut">
               <a:rPr lang="en-US" smtClean="0"/>
-              <a:t>4/7/2026</a:t>
+              <a:t>4/17/2026</a:t>
             </a:fld>
             <a:endParaRPr lang="en-US"/>
           </a:p>
@@ -3405,10 +3405,10 @@
       </p:sp>
       <p:pic>
         <p:nvPicPr>
-          <p:cNvPr id="3" name="Picture 2">
-            <a:extLst>
-              <a:ext uri="{FF2B5EF4-FFF2-40B4-BE49-F238E27FC236}">
-                <a16:creationId xmlns:a16="http://schemas.microsoft.com/office/drawing/2014/main" id="{D3E74010-DA5C-9354-C5FB-637ACC90A18C}"/>
+          <p:cNvPr id="13" name="Picture 12">
+            <a:extLst>
+              <a:ext uri="{FF2B5EF4-FFF2-40B4-BE49-F238E27FC236}">
+                <a16:creationId xmlns:a16="http://schemas.microsoft.com/office/drawing/2014/main" id="{FCCD4B6F-218C-490D-D09D-1F71F7F78DF0}"/>
               </a:ext>
             </a:extLst>
           </p:cNvPr>
@@ -3425,14 +3425,15 @@
               </a:ext>
             </a:extLst>
           </a:blip>
+          <a:srcRect r="2992"/>
           <a:stretch>
             <a:fillRect/>
           </a:stretch>
         </p:blipFill>
         <p:spPr>
           <a:xfrm>
-            <a:off x="0" y="2298009"/>
-            <a:ext cx="3742449" cy="3326621"/>
+            <a:off x="0" y="2130548"/>
+            <a:ext cx="3592460" cy="3291771"/>
           </a:xfrm>
           <a:prstGeom prst="rect">
             <a:avLst/>
@@ -3441,10 +3442,10 @@
       </p:pic>
       <p:pic>
         <p:nvPicPr>
-          <p:cNvPr id="5" name="Picture 4">
-            <a:extLst>
-              <a:ext uri="{FF2B5EF4-FFF2-40B4-BE49-F238E27FC236}">
-                <a16:creationId xmlns:a16="http://schemas.microsoft.com/office/drawing/2014/main" id="{AC1FDC4C-E876-726F-1A8E-CABB1A79096B}"/>
+          <p:cNvPr id="16" name="Picture 15">
+            <a:extLst>
+              <a:ext uri="{FF2B5EF4-FFF2-40B4-BE49-F238E27FC236}">
+                <a16:creationId xmlns:a16="http://schemas.microsoft.com/office/drawing/2014/main" id="{0DE6779E-9F7A-62D7-C127-3919761FB161}"/>
               </a:ext>
             </a:extLst>
           </p:cNvPr>
@@ -3461,14 +3462,15 @@
               </a:ext>
             </a:extLst>
           </a:blip>
+          <a:srcRect l="2071" r="2117"/>
           <a:stretch>
             <a:fillRect/>
           </a:stretch>
         </p:blipFill>
         <p:spPr>
           <a:xfrm>
-            <a:off x="3656074" y="2306618"/>
-            <a:ext cx="3742449" cy="3326621"/>
+            <a:off x="3599218" y="2095049"/>
+            <a:ext cx="3592460" cy="3332826"/>
           </a:xfrm>
           <a:prstGeom prst="rect">
             <a:avLst/>
@@ -3477,10 +3479,10 @@
       </p:pic>
       <p:pic>
         <p:nvPicPr>
-          <p:cNvPr id="7" name="Picture 6">
-            <a:extLst>
-              <a:ext uri="{FF2B5EF4-FFF2-40B4-BE49-F238E27FC236}">
-                <a16:creationId xmlns:a16="http://schemas.microsoft.com/office/drawing/2014/main" id="{75911D3A-B06E-AB61-0A0E-C12A5F709F52}"/>
+          <p:cNvPr id="18" name="Picture 17">
+            <a:extLst>
+              <a:ext uri="{FF2B5EF4-FFF2-40B4-BE49-F238E27FC236}">
+                <a16:creationId xmlns:a16="http://schemas.microsoft.com/office/drawing/2014/main" id="{82F189A7-119B-F5DF-E1FB-121EFB5E5402}"/>
               </a:ext>
             </a:extLst>
           </p:cNvPr>
@@ -3497,15 +3499,15 @@
               </a:ext>
             </a:extLst>
           </a:blip>
-          <a:srcRect l="1778" r="4055"/>
+          <a:srcRect r="3009"/>
           <a:stretch>
             <a:fillRect/>
           </a:stretch>
         </p:blipFill>
         <p:spPr>
           <a:xfrm>
-            <a:off x="7398523" y="2306618"/>
-            <a:ext cx="4711003" cy="3335230"/>
+            <a:off x="7191678" y="2057206"/>
+            <a:ext cx="4908182" cy="3373625"/>
           </a:xfrm>
           <a:prstGeom prst="rect">
             <a:avLst/>
